--- a/tests/goldens/build-pptx/merge-shadow.pptx
+++ b/tests/goldens/build-pptx/merge-shadow.pptx
@@ -1,6 +1,6 @@
 
 <file path=ppt/presentation.xml><?xml version="1.0" encoding="utf-8"?>
-<p:presentation xmlns:a="http://schemas.openxmlformats.org/drawingml/2006/main" xmlns:r="http://schemas.openxmlformats.org/officeDocument/2006/relationships" xmlns:p="http://schemas.openxmlformats.org/presentationml/2006/main" saveSubsetFonts="1" autoCompressPictures="0">
+<p:presentation xmlns:p="http://schemas.openxmlformats.org/presentationml/2006/main" xmlns:r="http://schemas.openxmlformats.org/officeDocument/2006/relationships" xmlns:a="http://schemas.openxmlformats.org/drawingml/2006/main" saveSubsetFonts="1" autoCompressPictures="0">
   <p:sldMasterIdLst>
     <p:sldMasterId id="2147483648" r:id="rId1"/>
   </p:sldMasterIdLst>
@@ -108,7 +108,7 @@
 </file>
 
 <file path=ppt/slideLayouts/slideLayout1.xml><?xml version="1.0" encoding="utf-8"?>
-<p:sldLayout xmlns:a="http://schemas.openxmlformats.org/drawingml/2006/main" xmlns:r="http://schemas.openxmlformats.org/officeDocument/2006/relationships" xmlns:p="http://schemas.openxmlformats.org/presentationml/2006/main" type="title" preserve="1">
+<p:sldLayout xmlns:p="http://schemas.openxmlformats.org/presentationml/2006/main" xmlns:a="http://schemas.openxmlformats.org/drawingml/2006/main" xmlns:ns1="http://schemas.microsoft.com/office/powerpoint/2010/main" type="title" preserve="1">
   <p:cSld name="Title Slide">
     <p:spTree>
       <p:nvGrpSpPr>
@@ -339,7 +339,7 @@
     </p:spTree>
     <p:extLst>
       <p:ext uri="{BB962C8B-B14F-4D97-AF65-F5344CB8AC3E}">
-        <p14:creationId xmlns:p14="http://schemas.microsoft.com/office/powerpoint/2010/main" val="3168075583"/>
+        <ns1:creationId val="3168075583"/>
       </p:ext>
     </p:extLst>
   </p:cSld>
@@ -350,7 +350,7 @@
 </file>
 
 <file path=ppt/slideLayouts/slideLayout10.xml><?xml version="1.0" encoding="utf-8"?>
-<p:sldLayout xmlns:a="http://schemas.openxmlformats.org/drawingml/2006/main" xmlns:r="http://schemas.openxmlformats.org/officeDocument/2006/relationships" xmlns:p="http://schemas.openxmlformats.org/presentationml/2006/main" type="vertTx" preserve="1">
+<p:sldLayout xmlns:p="http://schemas.openxmlformats.org/presentationml/2006/main" xmlns:a="http://schemas.openxmlformats.org/drawingml/2006/main" xmlns:ns1="http://schemas.microsoft.com/office/powerpoint/2010/main" type="vertTx" preserve="1">
   <p:cSld name="Title and Vertical Text">
     <p:spTree>
       <p:nvGrpSpPr>
@@ -509,7 +509,7 @@
     </p:spTree>
     <p:extLst>
       <p:ext uri="{BB962C8B-B14F-4D97-AF65-F5344CB8AC3E}">
-        <p14:creationId xmlns:p14="http://schemas.microsoft.com/office/powerpoint/2010/main" val="2910927964"/>
+        <ns1:creationId val="2910927964"/>
       </p:ext>
     </p:extLst>
   </p:cSld>
@@ -520,7 +520,7 @@
 </file>
 
 <file path=ppt/slideLayouts/slideLayout11.xml><?xml version="1.0" encoding="utf-8"?>
-<p:sldLayout xmlns:a="http://schemas.openxmlformats.org/drawingml/2006/main" xmlns:r="http://schemas.openxmlformats.org/officeDocument/2006/relationships" xmlns:p="http://schemas.openxmlformats.org/presentationml/2006/main" type="vertTitleAndTx" preserve="1">
+<p:sldLayout xmlns:p="http://schemas.openxmlformats.org/presentationml/2006/main" xmlns:a="http://schemas.openxmlformats.org/drawingml/2006/main" xmlns:ns1="http://schemas.microsoft.com/office/powerpoint/2010/main" type="vertTitleAndTx" preserve="1">
   <p:cSld name="Vertical Title and Text">
     <p:spTree>
       <p:nvGrpSpPr>
@@ -689,7 +689,7 @@
     </p:spTree>
     <p:extLst>
       <p:ext uri="{BB962C8B-B14F-4D97-AF65-F5344CB8AC3E}">
-        <p14:creationId xmlns:p14="http://schemas.microsoft.com/office/powerpoint/2010/main" val="3612223792"/>
+        <ns1:creationId val="3612223792"/>
       </p:ext>
     </p:extLst>
   </p:cSld>
@@ -700,7 +700,7 @@
 </file>
 
 <file path=ppt/slideLayouts/slideLayout2.xml><?xml version="1.0" encoding="utf-8"?>
-<p:sldLayout xmlns:a="http://schemas.openxmlformats.org/drawingml/2006/main" xmlns:r="http://schemas.openxmlformats.org/officeDocument/2006/relationships" xmlns:p="http://schemas.openxmlformats.org/presentationml/2006/main" type="obj" preserve="1">
+<p:sldLayout xmlns:p="http://schemas.openxmlformats.org/presentationml/2006/main" xmlns:a="http://schemas.openxmlformats.org/drawingml/2006/main" xmlns:ns1="http://schemas.microsoft.com/office/powerpoint/2010/main" type="obj" preserve="1">
   <p:cSld name="Title and Content">
     <p:spTree>
       <p:nvGrpSpPr>
@@ -859,7 +859,7 @@
     </p:spTree>
     <p:extLst>
       <p:ext uri="{BB962C8B-B14F-4D97-AF65-F5344CB8AC3E}">
-        <p14:creationId xmlns:p14="http://schemas.microsoft.com/office/powerpoint/2010/main" val="2614314258"/>
+        <ns1:creationId val="2614314258"/>
       </p:ext>
     </p:extLst>
   </p:cSld>
@@ -870,7 +870,7 @@
 </file>
 
 <file path=ppt/slideLayouts/slideLayout3.xml><?xml version="1.0" encoding="utf-8"?>
-<p:sldLayout xmlns:a="http://schemas.openxmlformats.org/drawingml/2006/main" xmlns:r="http://schemas.openxmlformats.org/officeDocument/2006/relationships" xmlns:p="http://schemas.openxmlformats.org/presentationml/2006/main" type="secHead" preserve="1">
+<p:sldLayout xmlns:p="http://schemas.openxmlformats.org/presentationml/2006/main" xmlns:a="http://schemas.openxmlformats.org/drawingml/2006/main" xmlns:ns1="http://schemas.microsoft.com/office/powerpoint/2010/main" type="secHead" preserve="1">
   <p:cSld name="Section Header">
     <p:spTree>
       <p:nvGrpSpPr>
@@ -1105,7 +1105,7 @@
     </p:spTree>
     <p:extLst>
       <p:ext uri="{BB962C8B-B14F-4D97-AF65-F5344CB8AC3E}">
-        <p14:creationId xmlns:p14="http://schemas.microsoft.com/office/powerpoint/2010/main" val="960648375"/>
+        <ns1:creationId val="960648375"/>
       </p:ext>
     </p:extLst>
   </p:cSld>
@@ -1116,7 +1116,7 @@
 </file>
 
 <file path=ppt/slideLayouts/slideLayout4.xml><?xml version="1.0" encoding="utf-8"?>
-<p:sldLayout xmlns:a="http://schemas.openxmlformats.org/drawingml/2006/main" xmlns:r="http://schemas.openxmlformats.org/officeDocument/2006/relationships" xmlns:p="http://schemas.openxmlformats.org/presentationml/2006/main" type="twoObj" preserve="1">
+<p:sldLayout xmlns:p="http://schemas.openxmlformats.org/presentationml/2006/main" xmlns:a="http://schemas.openxmlformats.org/drawingml/2006/main" xmlns:ns1="http://schemas.microsoft.com/office/powerpoint/2010/main" type="twoObj" preserve="1">
   <p:cSld name="Two Content">
     <p:spTree>
       <p:nvGrpSpPr>
@@ -1393,7 +1393,7 @@
     </p:spTree>
     <p:extLst>
       <p:ext uri="{BB962C8B-B14F-4D97-AF65-F5344CB8AC3E}">
-        <p14:creationId xmlns:p14="http://schemas.microsoft.com/office/powerpoint/2010/main" val="2782244947"/>
+        <ns1:creationId val="2782244947"/>
       </p:ext>
     </p:extLst>
   </p:cSld>
@@ -1404,7 +1404,7 @@
 </file>
 
 <file path=ppt/slideLayouts/slideLayout5.xml><?xml version="1.0" encoding="utf-8"?>
-<p:sldLayout xmlns:a="http://schemas.openxmlformats.org/drawingml/2006/main" xmlns:r="http://schemas.openxmlformats.org/officeDocument/2006/relationships" xmlns:p="http://schemas.openxmlformats.org/presentationml/2006/main" type="twoTxTwoObj" preserve="1">
+<p:sldLayout xmlns:p="http://schemas.openxmlformats.org/presentationml/2006/main" xmlns:a="http://schemas.openxmlformats.org/drawingml/2006/main" xmlns:ns1="http://schemas.microsoft.com/office/powerpoint/2010/main" type="twoTxTwoObj" preserve="1">
   <p:cSld name="Comparison">
     <p:spTree>
       <p:nvGrpSpPr>
@@ -1815,7 +1815,7 @@
     </p:spTree>
     <p:extLst>
       <p:ext uri="{BB962C8B-B14F-4D97-AF65-F5344CB8AC3E}">
-        <p14:creationId xmlns:p14="http://schemas.microsoft.com/office/powerpoint/2010/main" val="990158736"/>
+        <ns1:creationId val="990158736"/>
       </p:ext>
     </p:extLst>
   </p:cSld>
@@ -1826,7 +1826,7 @@
 </file>
 
 <file path=ppt/slideLayouts/slideLayout6.xml><?xml version="1.0" encoding="utf-8"?>
-<p:sldLayout xmlns:a="http://schemas.openxmlformats.org/drawingml/2006/main" xmlns:r="http://schemas.openxmlformats.org/officeDocument/2006/relationships" xmlns:p="http://schemas.openxmlformats.org/presentationml/2006/main" type="titleOnly" preserve="1">
+<p:sldLayout xmlns:p="http://schemas.openxmlformats.org/presentationml/2006/main" xmlns:a="http://schemas.openxmlformats.org/drawingml/2006/main" xmlns:ns1="http://schemas.microsoft.com/office/powerpoint/2010/main" type="titleOnly" preserve="1">
   <p:cSld name="Title Only">
     <p:spTree>
       <p:nvGrpSpPr>
@@ -1933,7 +1933,7 @@
     </p:spTree>
     <p:extLst>
       <p:ext uri="{BB962C8B-B14F-4D97-AF65-F5344CB8AC3E}">
-        <p14:creationId xmlns:p14="http://schemas.microsoft.com/office/powerpoint/2010/main" val="727027711"/>
+        <ns1:creationId val="727027711"/>
       </p:ext>
     </p:extLst>
   </p:cSld>
@@ -1944,7 +1944,7 @@
 </file>
 
 <file path=ppt/slideLayouts/slideLayout7.xml><?xml version="1.0" encoding="utf-8"?>
-<p:sldLayout xmlns:a="http://schemas.openxmlformats.org/drawingml/2006/main" xmlns:r="http://schemas.openxmlformats.org/officeDocument/2006/relationships" xmlns:p="http://schemas.openxmlformats.org/presentationml/2006/main" type="blank" preserve="1">
+<p:sldLayout xmlns:p="http://schemas.openxmlformats.org/presentationml/2006/main" xmlns:a="http://schemas.openxmlformats.org/drawingml/2006/main" xmlns:ns1="http://schemas.microsoft.com/office/powerpoint/2010/main" type="blank" preserve="1">
   <p:cSld name="Blank">
     <p:spTree>
       <p:nvGrpSpPr>
@@ -2028,7 +2028,7 @@
     </p:spTree>
     <p:extLst>
       <p:ext uri="{BB962C8B-B14F-4D97-AF65-F5344CB8AC3E}">
-        <p14:creationId xmlns:p14="http://schemas.microsoft.com/office/powerpoint/2010/main" val="1212999818"/>
+        <ns1:creationId val="1212999818"/>
       </p:ext>
     </p:extLst>
   </p:cSld>
@@ -2039,7 +2039,7 @@
 </file>
 
 <file path=ppt/slideLayouts/slideLayout8.xml><?xml version="1.0" encoding="utf-8"?>
-<p:sldLayout xmlns:a="http://schemas.openxmlformats.org/drawingml/2006/main" xmlns:r="http://schemas.openxmlformats.org/officeDocument/2006/relationships" xmlns:p="http://schemas.openxmlformats.org/presentationml/2006/main" type="objTx" preserve="1">
+<p:sldLayout xmlns:p="http://schemas.openxmlformats.org/presentationml/2006/main" xmlns:a="http://schemas.openxmlformats.org/drawingml/2006/main" xmlns:ns1="http://schemas.microsoft.com/office/powerpoint/2010/main" type="objTx" preserve="1">
   <p:cSld name="Content with Caption">
     <p:spTree>
       <p:nvGrpSpPr>
@@ -2305,7 +2305,7 @@
     </p:spTree>
     <p:extLst>
       <p:ext uri="{BB962C8B-B14F-4D97-AF65-F5344CB8AC3E}">
-        <p14:creationId xmlns:p14="http://schemas.microsoft.com/office/powerpoint/2010/main" val="1840726560"/>
+        <ns1:creationId val="1840726560"/>
       </p:ext>
     </p:extLst>
   </p:cSld>
@@ -2316,7 +2316,7 @@
 </file>
 
 <file path=ppt/slideLayouts/slideLayout9.xml><?xml version="1.0" encoding="utf-8"?>
-<p:sldLayout xmlns:a="http://schemas.openxmlformats.org/drawingml/2006/main" xmlns:r="http://schemas.openxmlformats.org/officeDocument/2006/relationships" xmlns:p="http://schemas.openxmlformats.org/presentationml/2006/main" type="picTx" preserve="1">
+<p:sldLayout xmlns:p="http://schemas.openxmlformats.org/presentationml/2006/main" xmlns:a="http://schemas.openxmlformats.org/drawingml/2006/main" xmlns:ns1="http://schemas.microsoft.com/office/powerpoint/2010/main" type="picTx" preserve="1">
   <p:cSld name="Picture with Caption">
     <p:spTree>
       <p:nvGrpSpPr>
@@ -2558,7 +2558,7 @@
     </p:spTree>
     <p:extLst>
       <p:ext uri="{BB962C8B-B14F-4D97-AF65-F5344CB8AC3E}">
-        <p14:creationId xmlns:p14="http://schemas.microsoft.com/office/powerpoint/2010/main" val="3889236939"/>
+        <ns1:creationId val="3889236939"/>
       </p:ext>
     </p:extLst>
   </p:cSld>
@@ -2569,7 +2569,7 @@
 </file>
 
 <file path=ppt/slideMasters/slideMaster1.xml><?xml version="1.0" encoding="utf-8"?>
-<p:sldMaster xmlns:a="http://schemas.openxmlformats.org/drawingml/2006/main" xmlns:r="http://schemas.openxmlformats.org/officeDocument/2006/relationships" xmlns:p="http://schemas.openxmlformats.org/presentationml/2006/main">
+<p:sldMaster xmlns:p="http://schemas.openxmlformats.org/presentationml/2006/main" xmlns:a="http://schemas.openxmlformats.org/drawingml/2006/main" xmlns:ns1="http://schemas.microsoft.com/office/powerpoint/2010/main" xmlns:r="http://schemas.openxmlformats.org/officeDocument/2006/relationships">
   <p:cSld>
     <p:bg>
       <p:bgRef idx="1001">
@@ -2807,7 +2807,7 @@
     </p:spTree>
     <p:extLst>
       <p:ext uri="{BB962C8B-B14F-4D97-AF65-F5344CB8AC3E}">
-        <p14:creationId xmlns:p14="http://schemas.microsoft.com/office/powerpoint/2010/main" val="2209977519"/>
+        <ns1:creationId val="2209977519"/>
       </p:ext>
     </p:extLst>
   </p:cSld>
@@ -3079,7 +3079,7 @@
 </file>
 
 <file path=ppt/slides/slide1.xml><?xml version="1.0" encoding="utf-8"?>
-<p:sld xmlns:a="http://schemas.openxmlformats.org/drawingml/2006/main" xmlns:p="http://schemas.openxmlformats.org/presentationml/2006/main" xmlns:r="http://schemas.openxmlformats.org/officeDocument/2006/relationships">
+<p:sld xmlns:p="http://schemas.openxmlformats.org/presentationml/2006/main" xmlns:a="http://schemas.openxmlformats.org/drawingml/2006/main" xmlns:r="http://schemas.openxmlformats.org/officeDocument/2006/relationships">
   <p:cSld>
     <p:bg>
       <p:bgPr>
@@ -3098,7 +3098,7 @@
       <p:grpSpPr/>
       <p:pic>
         <p:nvPicPr>
-          <p:cNvPr id="2" name="ph" descr="gid:1:0"/>
+          <p:cNvPr id="2" name="ph" descr="gid:1:0">    </p:cNvPr>
           <p:cNvPicPr>
             <a:picLocks noChangeAspect="1"/>
           </p:cNvPicPr>
@@ -3161,7 +3161,9 @@
                       </a:r>
                     </a:p>
                   </a:txBody>
-                  <a:tcPr anchor="ctr" marL="47625" marR="47625" marT="22860" marB="22860"/>
+                  <a:tcPr anchor="ctr" marL="47625" marR="47625" marT="22860" marB="22860">
+                    <a:noFill/>
+                  </a:tcPr>
                 </a:tc>
                 <a:tc hMerge="1">
                   <a:txBody>
@@ -3184,7 +3186,9 @@
                       </a:r>
                     </a:p>
                   </a:txBody>
-                  <a:tcPr anchor="ctr" marL="47625" marR="47625" marT="22860" marB="22860"/>
+                  <a:tcPr anchor="ctr" marL="47625" marR="47625" marT="22860" marB="22860">
+                    <a:noFill/>
+                  </a:tcPr>
                 </a:tc>
                 <a:tc>
                   <a:txBody>
@@ -3197,7 +3201,9 @@
                       </a:r>
                     </a:p>
                   </a:txBody>
-                  <a:tcPr anchor="ctr" marL="47625" marR="47625" marT="22860" marB="22860"/>
+                  <a:tcPr anchor="ctr" marL="47625" marR="47625" marT="22860" marB="22860">
+                    <a:noFill/>
+                  </a:tcPr>
                 </a:tc>
               </a:tr>
             </a:tbl>
